--- a/canvas/avc248/slides/week-01-ai-foundations.pptx
+++ b/canvas/avc248/slides/week-01-ai-foundations.pptx
@@ -1884,7 +1884,7 @@
                 <a:ea typeface="Calibri" pitchFamily="34" charset="-122"/>
                 <a:cs typeface="Calibri" pitchFamily="34" charset="-120"/>
               </a:rPr>
-              <a:t>A large language model is trained on huge amounts of text to predict the next words. </a:t>
+              <a:t xml:space="preserve">A large language model is trained on huge amounts of text to predict the next words. </a:t>
             </a:r>
             <a:pPr algn="l" indent="0" marL="0">
               <a:lnSpc>
@@ -2044,7 +2044,7 @@
       </p:sp>
       <p:pic>
         <p:nvPicPr>
-          <p:cNvPr id="11" name="Image 0" descr="preencoded.png">    </p:cNvPr>
+          <p:cNvPr id="11" name="Image 0" descr="preencoded.png"/>
           <p:cNvPicPr>
             <a:picLocks noChangeAspect="1"/>
           </p:cNvPicPr>
@@ -2134,7 +2134,7 @@
       </p:sp>
       <p:pic>
         <p:nvPicPr>
-          <p:cNvPr id="14" name="Image 1" descr="preencoded.png">    </p:cNvPr>
+          <p:cNvPr id="14" name="Image 1" descr="preencoded.png"/>
           <p:cNvPicPr>
             <a:picLocks noChangeAspect="1"/>
           </p:cNvPicPr>
@@ -2224,7 +2224,7 @@
       </p:sp>
       <p:pic>
         <p:nvPicPr>
-          <p:cNvPr id="17" name="Image 2" descr="preencoded.png">    </p:cNvPr>
+          <p:cNvPr id="17" name="Image 2" descr="preencoded.png"/>
           <p:cNvPicPr>
             <a:picLocks noChangeAspect="1"/>
           </p:cNvPicPr>
@@ -2343,7 +2343,7 @@
       </p:sp>
       <p:pic>
         <p:nvPicPr>
-          <p:cNvPr id="21" name="Image 3" descr="preencoded.png">    </p:cNvPr>
+          <p:cNvPr id="21" name="Image 3" descr="preencoded.png"/>
           <p:cNvPicPr>
             <a:picLocks noChangeAspect="1"/>
           </p:cNvPicPr>
@@ -2699,7 +2699,7 @@
       </p:sp>
       <p:pic>
         <p:nvPicPr>
-          <p:cNvPr id="8" name="Image 0" descr="preencoded.png">    </p:cNvPr>
+          <p:cNvPr id="8" name="Image 0" descr="preencoded.png"/>
           <p:cNvPicPr>
             <a:picLocks noChangeAspect="1"/>
           </p:cNvPicPr>
@@ -2991,7 +2991,7 @@
       </p:sp>
       <p:pic>
         <p:nvPicPr>
-          <p:cNvPr id="14" name="Image 1" descr="preencoded.png">    </p:cNvPr>
+          <p:cNvPr id="14" name="Image 1" descr="preencoded.png"/>
           <p:cNvPicPr>
             <a:picLocks noChangeAspect="1"/>
           </p:cNvPicPr>
@@ -3367,7 +3367,7 @@
       </p:sp>
       <p:pic>
         <p:nvPicPr>
-          <p:cNvPr id="7" name="Image 0" descr="preencoded.png">    </p:cNvPr>
+          <p:cNvPr id="7" name="Image 0" descr="preencoded.png"/>
           <p:cNvPicPr>
             <a:picLocks noChangeAspect="1"/>
           </p:cNvPicPr>
@@ -3595,7 +3595,7 @@
       </p:sp>
       <p:pic>
         <p:nvPicPr>
-          <p:cNvPr id="13" name="Image 1" descr="preencoded.png">    </p:cNvPr>
+          <p:cNvPr id="13" name="Image 1" descr="preencoded.png"/>
           <p:cNvPicPr>
             <a:picLocks noChangeAspect="1"/>
           </p:cNvPicPr>
@@ -3719,7 +3719,7 @@
       </p:sp>
       <p:pic>
         <p:nvPicPr>
-          <p:cNvPr id="17" name="Image 2" descr="preencoded.png">    </p:cNvPr>
+          <p:cNvPr id="17" name="Image 2" descr="preencoded.png"/>
           <p:cNvPicPr>
             <a:picLocks noChangeAspect="1"/>
           </p:cNvPicPr>
@@ -3843,7 +3843,7 @@
       </p:sp>
       <p:pic>
         <p:nvPicPr>
-          <p:cNvPr id="21" name="Image 3" descr="preencoded.png">    </p:cNvPr>
+          <p:cNvPr id="21" name="Image 3" descr="preencoded.png"/>
           <p:cNvPicPr>
             <a:picLocks noChangeAspect="1"/>
           </p:cNvPicPr>
@@ -4215,7 +4215,7 @@
       </p:sp>
       <p:pic>
         <p:nvPicPr>
-          <p:cNvPr id="11" name="Image 0" descr="preencoded.png">    </p:cNvPr>
+          <p:cNvPr id="11" name="Image 0" descr="preencoded.png"/>
           <p:cNvPicPr>
             <a:picLocks noChangeAspect="1"/>
           </p:cNvPicPr>
@@ -4418,7 +4418,7 @@
       </p:sp>
       <p:pic>
         <p:nvPicPr>
-          <p:cNvPr id="18" name="Image 1" descr="preencoded.png">    </p:cNvPr>
+          <p:cNvPr id="18" name="Image 1" descr="preencoded.png"/>
           <p:cNvPicPr>
             <a:picLocks noChangeAspect="1"/>
           </p:cNvPicPr>
@@ -4621,7 +4621,7 @@
       </p:sp>
       <p:pic>
         <p:nvPicPr>
-          <p:cNvPr id="25" name="Image 2" descr="preencoded.png">    </p:cNvPr>
+          <p:cNvPr id="25" name="Image 2" descr="preencoded.png"/>
           <p:cNvPicPr>
             <a:picLocks noChangeAspect="1"/>
           </p:cNvPicPr>
@@ -4824,7 +4824,7 @@
       </p:sp>
       <p:pic>
         <p:nvPicPr>
-          <p:cNvPr id="32" name="Image 3" descr="preencoded.png">    </p:cNvPr>
+          <p:cNvPr id="32" name="Image 3" descr="preencoded.png"/>
           <p:cNvPicPr>
             <a:picLocks noChangeAspect="1"/>
           </p:cNvPicPr>
@@ -5027,7 +5027,7 @@
       </p:sp>
       <p:pic>
         <p:nvPicPr>
-          <p:cNvPr id="39" name="Image 4" descr="preencoded.png">    </p:cNvPr>
+          <p:cNvPr id="39" name="Image 4" descr="preencoded.png"/>
           <p:cNvPicPr>
             <a:picLocks noChangeAspect="1"/>
           </p:cNvPicPr>
@@ -5305,7 +5305,7 @@
                 <a:ea typeface="Georgia" pitchFamily="34" charset="-122"/>
                 <a:cs typeface="Georgia" pitchFamily="34" charset="-120"/>
               </a:rPr>
-              <a:t>“Write my resume.”</a:t>
+              <a:t>“Tell me about this company.”</a:t>
             </a:r>
             <a:endParaRPr lang="en-US" sz="1900" dirty="0"/>
           </a:p>
@@ -5482,7 +5482,7 @@
                 <a:ea typeface="Calibri" pitchFamily="34" charset="-122"/>
                 <a:cs typeface="Calibri" pitchFamily="34" charset="-120"/>
               </a:rPr>
-              <a:t>“You are a hiring manager for junior motion designers. Here is my current resume [paste] and this job posting [paste]. Suggest edits to my bullet points so they match the posting’s language, keep it truthful to my real experience, and return a bulleted list of suggested changes.”</a:t>
+              <a:t>“You are helping me prepare for an interview. Here is the company’s About page and the job posting [paste]. Summarize what this company does and who their clients seem to be, list three things they probably care about in a junior designer, and give me five smart questions I could ask in the interview.”</a:t>
             </a:r>
             <a:endParaRPr lang="en-US" sz="1150" dirty="0"/>
           </a:p>
@@ -5543,7 +5543,7 @@
                 <a:ea typeface="Georgia" pitchFamily="34" charset="-122"/>
                 <a:cs typeface="Georgia" pitchFamily="34" charset="-120"/>
               </a:rPr>
-              <a:t>The strong prompt gives role, context, your material, and a format. </a:t>
+              <a:t xml:space="preserve">The strong prompt gives role, context, your material, and a format. </a:t>
             </a:r>
             <a:pPr algn="ctr" indent="0" marL="0">
               <a:buNone/>
@@ -5557,7 +5557,7 @@
                 <a:ea typeface="Georgia" pitchFamily="34" charset="-122"/>
                 <a:cs typeface="Georgia" pitchFamily="34" charset="-120"/>
               </a:rPr>
-              <a:t>And you still edit the result.</a:t>
+              <a:t>And you still verify the facts and use your own judgment.</a:t>
             </a:r>
             <a:endParaRPr lang="en-US" sz="1500" dirty="0"/>
           </a:p>
@@ -5756,7 +5756,7 @@
       </p:sp>
       <p:pic>
         <p:nvPicPr>
-          <p:cNvPr id="7" name="Image 0" descr="preencoded.png">    </p:cNvPr>
+          <p:cNvPr id="7" name="Image 0" descr="preencoded.png"/>
           <p:cNvPicPr>
             <a:picLocks noChangeAspect="1"/>
           </p:cNvPicPr>
@@ -5883,7 +5883,7 @@
       </p:sp>
       <p:pic>
         <p:nvPicPr>
-          <p:cNvPr id="11" name="Image 1" descr="preencoded.png">    </p:cNvPr>
+          <p:cNvPr id="11" name="Image 1" descr="preencoded.png"/>
           <p:cNvPicPr>
             <a:picLocks noChangeAspect="1"/>
           </p:cNvPicPr>
@@ -6010,7 +6010,7 @@
       </p:sp>
       <p:pic>
         <p:nvPicPr>
-          <p:cNvPr id="15" name="Image 2" descr="preencoded.png">    </p:cNvPr>
+          <p:cNvPr id="15" name="Image 2" descr="preencoded.png"/>
           <p:cNvPicPr>
             <a:picLocks noChangeAspect="1"/>
           </p:cNvPicPr>
@@ -6137,7 +6137,7 @@
       </p:sp>
       <p:pic>
         <p:nvPicPr>
-          <p:cNvPr id="19" name="Image 3" descr="preencoded.png">    </p:cNvPr>
+          <p:cNvPr id="19" name="Image 3" descr="preencoded.png"/>
           <p:cNvPicPr>
             <a:picLocks noChangeAspect="1"/>
           </p:cNvPicPr>
@@ -6264,7 +6264,7 @@
       </p:sp>
       <p:pic>
         <p:nvPicPr>
-          <p:cNvPr id="23" name="Image 4" descr="preencoded.png">    </p:cNvPr>
+          <p:cNvPr id="23" name="Image 4" descr="preencoded.png"/>
           <p:cNvPicPr>
             <a:picLocks noChangeAspect="1"/>
           </p:cNvPicPr>
@@ -6391,7 +6391,7 @@
       </p:sp>
       <p:pic>
         <p:nvPicPr>
-          <p:cNvPr id="27" name="Image 5" descr="preencoded.png">    </p:cNvPr>
+          <p:cNvPr id="27" name="Image 5" descr="preencoded.png"/>
           <p:cNvPicPr>
             <a:picLocks noChangeAspect="1"/>
           </p:cNvPicPr>
@@ -6560,7 +6560,7 @@
       </p:sp>
       <p:pic>
         <p:nvPicPr>
-          <p:cNvPr id="5" name="Image 0" descr="preencoded.png">    </p:cNvPr>
+          <p:cNvPr id="5" name="Image 0" descr="preencoded.png"/>
           <p:cNvPicPr>
             <a:picLocks noChangeAspect="1"/>
           </p:cNvPicPr>
